--- a/knf/decks/d1p1.pptx
+++ b/knf/decks/d1p1.pptx
@@ -4589,7 +4589,7 @@
                 <a:ea typeface="Pretendard"/>
                 <a:cs typeface="Pretendard"/>
               </a:rPr>
-              <a:t>45분 뒤에는</a:t>
+              <a:t>50분 뒤에는</a:t>
             </a:r>
           </a:p>
         </p:txBody>
@@ -6618,7 +6618,7 @@
                 <a:ea typeface="Pretendard"/>
                 <a:cs typeface="Pretendard"/>
               </a:rPr>
-              <a:t>하루의 결과물이 다음 날의 출발점이 된다 · 1교시 = 45분 수업 + 15분 휴식</a:t>
+              <a:t>하루의 결과물이 다음 날의 출발점이 된다 · 1교시 = 50분 수업 + 10분 휴식</a:t>
             </a:r>
           </a:p>
         </p:txBody>

--- a/knf/decks/d1p1.pptx
+++ b/knf/decks/d1p1.pptx
@@ -3099,7 +3099,7 @@
       <p:grpSpPr/>
       <p:sp>
         <p:nvSpPr>
-          <p:cNvPr id="2" name="Oval 1"/>
+          <p:cNvPr id="2" name="deckgen:decor"/>
           <p:cNvSpPr/>
           <p:nvPr/>
         </p:nvSpPr>
@@ -3129,7 +3129,7 @@
       </p:sp>
       <p:sp>
         <p:nvSpPr>
-          <p:cNvPr id="3" name="Oval 2"/>
+          <p:cNvPr id="3" name="deckgen:decor"/>
           <p:cNvSpPr/>
           <p:nvPr/>
         </p:nvSpPr>
@@ -3159,7 +3159,7 @@
       </p:sp>
       <p:sp>
         <p:nvSpPr>
-          <p:cNvPr id="4" name="Oval 3"/>
+          <p:cNvPr id="4" name="deckgen:decor"/>
           <p:cNvSpPr/>
           <p:nvPr/>
         </p:nvSpPr>
@@ -3189,7 +3189,7 @@
       </p:sp>
       <p:sp>
         <p:nvSpPr>
-          <p:cNvPr id="5" name="Rectangle 4"/>
+          <p:cNvPr id="5" name="deckgen:decor"/>
           <p:cNvSpPr/>
           <p:nvPr/>
         </p:nvSpPr>
@@ -3219,7 +3219,7 @@
       </p:sp>
       <p:sp>
         <p:nvSpPr>
-          <p:cNvPr id="6" name="Oval 5"/>
+          <p:cNvPr id="6" name="deckgen:decor"/>
           <p:cNvSpPr/>
           <p:nvPr/>
         </p:nvSpPr>
@@ -3249,7 +3249,7 @@
       </p:sp>
       <p:sp>
         <p:nvSpPr>
-          <p:cNvPr id="7" name="Oval 6"/>
+          <p:cNvPr id="7" name="deckgen:decor"/>
           <p:cNvSpPr/>
           <p:nvPr/>
         </p:nvSpPr>
@@ -3279,7 +3279,7 @@
       </p:sp>
       <p:sp>
         <p:nvSpPr>
-          <p:cNvPr id="8" name="Oval 7"/>
+          <p:cNvPr id="8" name="deckgen:decor"/>
           <p:cNvSpPr/>
           <p:nvPr/>
         </p:nvSpPr>
@@ -3309,7 +3309,7 @@
       </p:sp>
       <p:sp>
         <p:nvSpPr>
-          <p:cNvPr id="9" name="Oval 8"/>
+          <p:cNvPr id="9" name="deckgen:decor"/>
           <p:cNvSpPr/>
           <p:nvPr/>
         </p:nvSpPr>
@@ -3339,7 +3339,7 @@
       </p:sp>
       <p:sp>
         <p:nvSpPr>
-          <p:cNvPr id="10" name="Rectangle 9"/>
+          <p:cNvPr id="10" name="deckgen:decor"/>
           <p:cNvSpPr/>
           <p:nvPr/>
         </p:nvSpPr>
@@ -3617,7 +3617,7 @@
       <p:grpSpPr/>
       <p:sp>
         <p:nvSpPr>
-          <p:cNvPr id="2" name="Oval 1"/>
+          <p:cNvPr id="2" name="deckgen:decor"/>
           <p:cNvSpPr/>
           <p:nvPr/>
         </p:nvSpPr>
@@ -3647,7 +3647,7 @@
       </p:sp>
       <p:sp>
         <p:nvSpPr>
-          <p:cNvPr id="3" name="Oval 2"/>
+          <p:cNvPr id="3" name="deckgen:decor"/>
           <p:cNvSpPr/>
           <p:nvPr/>
         </p:nvSpPr>
@@ -4424,7 +4424,7 @@
       <p:grpSpPr/>
       <p:sp>
         <p:nvSpPr>
-          <p:cNvPr id="2" name="Oval 1"/>
+          <p:cNvPr id="2" name="deckgen:decor"/>
           <p:cNvSpPr/>
           <p:nvPr/>
         </p:nvSpPr>
@@ -4454,7 +4454,7 @@
       </p:sp>
       <p:sp>
         <p:nvSpPr>
-          <p:cNvPr id="3" name="Oval 2"/>
+          <p:cNvPr id="3" name="deckgen:decor"/>
           <p:cNvSpPr/>
           <p:nvPr/>
         </p:nvSpPr>
@@ -4484,7 +4484,7 @@
       </p:sp>
       <p:sp>
         <p:nvSpPr>
-          <p:cNvPr id="4" name="Oval 3"/>
+          <p:cNvPr id="4" name="deckgen:decor"/>
           <p:cNvSpPr/>
           <p:nvPr/>
         </p:nvSpPr>
@@ -5269,7 +5269,7 @@
       <p:grpSpPr/>
       <p:sp>
         <p:nvSpPr>
-          <p:cNvPr id="2" name="Oval 1"/>
+          <p:cNvPr id="2" name="deckgen:decor"/>
           <p:cNvSpPr/>
           <p:nvPr/>
         </p:nvSpPr>
@@ -5299,7 +5299,7 @@
       </p:sp>
       <p:sp>
         <p:nvSpPr>
-          <p:cNvPr id="3" name="Oval 2"/>
+          <p:cNvPr id="3" name="deckgen:decor"/>
           <p:cNvSpPr/>
           <p:nvPr/>
         </p:nvSpPr>
@@ -5329,7 +5329,7 @@
       </p:sp>
       <p:sp>
         <p:nvSpPr>
-          <p:cNvPr id="4" name="Oval 3"/>
+          <p:cNvPr id="4" name="deckgen:decor"/>
           <p:cNvSpPr/>
           <p:nvPr/>
         </p:nvSpPr>
@@ -6755,7 +6755,7 @@
       <p:grpSpPr/>
       <p:sp>
         <p:nvSpPr>
-          <p:cNvPr id="2" name="Oval 1"/>
+          <p:cNvPr id="2" name="deckgen:decor"/>
           <p:cNvSpPr/>
           <p:nvPr/>
         </p:nvSpPr>
@@ -6785,7 +6785,7 @@
       </p:sp>
       <p:sp>
         <p:nvSpPr>
-          <p:cNvPr id="3" name="Oval 2"/>
+          <p:cNvPr id="3" name="deckgen:decor"/>
           <p:cNvSpPr/>
           <p:nvPr/>
         </p:nvSpPr>
@@ -6815,7 +6815,7 @@
       </p:sp>
       <p:sp>
         <p:nvSpPr>
-          <p:cNvPr id="4" name="Oval 3"/>
+          <p:cNvPr id="4" name="deckgen:decor"/>
           <p:cNvSpPr/>
           <p:nvPr/>
         </p:nvSpPr>
@@ -7021,7 +7021,7 @@
       </p:sp>
       <p:sp>
         <p:nvSpPr>
-          <p:cNvPr id="10" name="TextBox 9"/>
+          <p:cNvPr id="10" name="deckgen:ornament"/>
           <p:cNvSpPr txBox="1"/>
           <p:nvPr/>
         </p:nvSpPr>
@@ -7206,7 +7206,7 @@
       </p:sp>
       <p:sp>
         <p:nvSpPr>
-          <p:cNvPr id="14" name="TextBox 13"/>
+          <p:cNvPr id="14" name="deckgen:ornament"/>
           <p:cNvSpPr txBox="1"/>
           <p:nvPr/>
         </p:nvSpPr>
@@ -7391,7 +7391,7 @@
       </p:sp>
       <p:sp>
         <p:nvSpPr>
-          <p:cNvPr id="18" name="TextBox 17"/>
+          <p:cNvPr id="18" name="deckgen:ornament"/>
           <p:cNvSpPr txBox="1"/>
           <p:nvPr/>
         </p:nvSpPr>
@@ -7713,7 +7713,7 @@
       <p:grpSpPr/>
       <p:sp>
         <p:nvSpPr>
-          <p:cNvPr id="2" name="Oval 1"/>
+          <p:cNvPr id="2" name="deckgen:decor"/>
           <p:cNvSpPr/>
           <p:nvPr/>
         </p:nvSpPr>
@@ -7743,7 +7743,7 @@
       </p:sp>
       <p:sp>
         <p:nvSpPr>
-          <p:cNvPr id="3" name="Oval 2"/>
+          <p:cNvPr id="3" name="deckgen:decor"/>
           <p:cNvSpPr/>
           <p:nvPr/>
         </p:nvSpPr>
@@ -7773,7 +7773,7 @@
       </p:sp>
       <p:sp>
         <p:nvSpPr>
-          <p:cNvPr id="4" name="Oval 3"/>
+          <p:cNvPr id="4" name="deckgen:decor"/>
           <p:cNvSpPr/>
           <p:nvPr/>
         </p:nvSpPr>
@@ -8774,7 +8774,7 @@
       <p:grpSpPr/>
       <p:sp>
         <p:nvSpPr>
-          <p:cNvPr id="2" name="Oval 1"/>
+          <p:cNvPr id="2" name="deckgen:decor"/>
           <p:cNvSpPr/>
           <p:nvPr/>
         </p:nvSpPr>
@@ -8804,7 +8804,7 @@
       </p:sp>
       <p:sp>
         <p:nvSpPr>
-          <p:cNvPr id="3" name="Oval 2"/>
+          <p:cNvPr id="3" name="deckgen:decor"/>
           <p:cNvSpPr/>
           <p:nvPr/>
         </p:nvSpPr>
@@ -8834,7 +8834,7 @@
       </p:sp>
       <p:sp>
         <p:nvSpPr>
-          <p:cNvPr id="4" name="Oval 3"/>
+          <p:cNvPr id="4" name="deckgen:decor"/>
           <p:cNvSpPr/>
           <p:nvPr/>
         </p:nvSpPr>
@@ -9302,7 +9302,7 @@
                 <a:ea typeface="Pretendard"/>
                 <a:cs typeface="Pretendard"/>
               </a:rPr>
-              <a:t>약 15분 동안 응시</a:t>
+              <a:t>약 20분 동안 응시</a:t>
             </a:r>
           </a:p>
         </p:txBody>
@@ -9801,7 +9801,7 @@
       <p:grpSpPr/>
       <p:sp>
         <p:nvSpPr>
-          <p:cNvPr id="2" name="Oval 1"/>
+          <p:cNvPr id="2" name="deckgen:decor"/>
           <p:cNvSpPr/>
           <p:nvPr/>
         </p:nvSpPr>
@@ -9831,7 +9831,7 @@
       </p:sp>
       <p:sp>
         <p:nvSpPr>
-          <p:cNvPr id="3" name="Oval 2"/>
+          <p:cNvPr id="3" name="deckgen:decor"/>
           <p:cNvSpPr/>
           <p:nvPr/>
         </p:nvSpPr>
@@ -9861,7 +9861,7 @@
       </p:sp>
       <p:sp>
         <p:nvSpPr>
-          <p:cNvPr id="4" name="Oval 3"/>
+          <p:cNvPr id="4" name="deckgen:decor"/>
           <p:cNvSpPr/>
           <p:nvPr/>
         </p:nvSpPr>
@@ -10329,7 +10329,7 @@
                 <a:ea typeface="Pretendard"/>
                 <a:cs typeface="Pretendard"/>
               </a:rPr>
-              <a:t>약 15분</a:t>
+              <a:t>약 20분</a:t>
             </a:r>
           </a:p>
         </p:txBody>
@@ -10904,7 +10904,7 @@
       <p:grpSpPr/>
       <p:sp>
         <p:nvSpPr>
-          <p:cNvPr id="2" name="Oval 1"/>
+          <p:cNvPr id="2" name="deckgen:decor"/>
           <p:cNvSpPr/>
           <p:nvPr/>
         </p:nvSpPr>
@@ -10934,7 +10934,7 @@
       </p:sp>
       <p:sp>
         <p:nvSpPr>
-          <p:cNvPr id="3" name="Oval 2"/>
+          <p:cNvPr id="3" name="deckgen:decor"/>
           <p:cNvSpPr/>
           <p:nvPr/>
         </p:nvSpPr>
@@ -10964,7 +10964,7 @@
       </p:sp>
       <p:sp>
         <p:nvSpPr>
-          <p:cNvPr id="4" name="Oval 3"/>
+          <p:cNvPr id="4" name="deckgen:decor"/>
           <p:cNvSpPr/>
           <p:nvPr/>
         </p:nvSpPr>
@@ -11211,7 +11211,7 @@
       </p:sp>
       <p:sp>
         <p:nvSpPr>
-          <p:cNvPr id="11" name="TextBox 10"/>
+          <p:cNvPr id="11" name="deckgen:ornament"/>
           <p:cNvSpPr txBox="1"/>
           <p:nvPr/>
         </p:nvSpPr>
@@ -11535,7 +11535,7 @@
       <p:grpSpPr/>
       <p:sp>
         <p:nvSpPr>
-          <p:cNvPr id="2" name="Oval 1"/>
+          <p:cNvPr id="2" name="deckgen:decor"/>
           <p:cNvSpPr/>
           <p:nvPr/>
         </p:nvSpPr>
@@ -11565,7 +11565,7 @@
       </p:sp>
       <p:sp>
         <p:nvSpPr>
-          <p:cNvPr id="3" name="Oval 2"/>
+          <p:cNvPr id="3" name="deckgen:decor"/>
           <p:cNvSpPr/>
           <p:nvPr/>
         </p:nvSpPr>
@@ -11595,7 +11595,7 @@
       </p:sp>
       <p:sp>
         <p:nvSpPr>
-          <p:cNvPr id="4" name="Oval 3"/>
+          <p:cNvPr id="4" name="deckgen:decor"/>
           <p:cNvSpPr/>
           <p:nvPr/>
         </p:nvSpPr>
@@ -11801,7 +11801,7 @@
       </p:sp>
       <p:sp>
         <p:nvSpPr>
-          <p:cNvPr id="10" name="TextBox 9"/>
+          <p:cNvPr id="10" name="deckgen:ornament"/>
           <p:cNvSpPr txBox="1"/>
           <p:nvPr/>
         </p:nvSpPr>
@@ -11986,7 +11986,7 @@
       </p:sp>
       <p:sp>
         <p:nvSpPr>
-          <p:cNvPr id="14" name="TextBox 13"/>
+          <p:cNvPr id="14" name="deckgen:ornament"/>
           <p:cNvSpPr txBox="1"/>
           <p:nvPr/>
         </p:nvSpPr>
@@ -12171,7 +12171,7 @@
       </p:sp>
       <p:sp>
         <p:nvSpPr>
-          <p:cNvPr id="18" name="TextBox 17"/>
+          <p:cNvPr id="18" name="deckgen:ornament"/>
           <p:cNvSpPr txBox="1"/>
           <p:nvPr/>
         </p:nvSpPr>
